--- a/PowerBI/project/The Air We Breathe.pptx
+++ b/PowerBI/project/The Air We Breathe.pptx
@@ -8522,7 +8522,7 @@
 <dgm:dataModel xmlns:dgm="http://schemas.openxmlformats.org/drawingml/2006/diagram" xmlns:a="http://schemas.openxmlformats.org/drawingml/2006/main">
   <dgm:ptLst>
     <dgm:pt modelId="{85A85C5A-9A20-46A4-82D7-E59B4536B2C4}" type="doc">
-      <dgm:prSet loTypeId="urn:microsoft.com/office/officeart/2005/8/layout/vList3" loCatId="list" qsTypeId="urn:microsoft.com/office/officeart/2005/8/quickstyle/simple1" qsCatId="simple" csTypeId="urn:microsoft.com/office/officeart/2005/8/colors/accent1_2" csCatId="accent1"/>
+      <dgm:prSet loTypeId="urn:microsoft.com/office/officeart/2005/8/layout/vList3" loCatId="list" qsTypeId="urn:microsoft.com/office/officeart/2005/8/quickstyle/simple1" qsCatId="simple" csTypeId="urn:microsoft.com/office/officeart/2005/8/colors/accent1_2" csCatId="accent1" phldr="1"/>
       <dgm:spPr/>
       <dgm:t>
         <a:bodyPr/>
@@ -8541,14 +8541,26 @@
         <a:p>
           <a:pPr rtl="0"/>
           <a:r>
-            <a:rPr lang="en-US" b="1" smtClean="0"/>
+            <a:rPr lang="en-US" b="1" dirty="0" smtClean="0"/>
             <a:t>Primary Pollutants Identified:</a:t>
           </a:r>
           <a:r>
-            <a:rPr lang="en-US" smtClean="0"/>
-            <a:t> The analysis focuses on $CO$, $NO_2$, $O_3$, $PM10$, $PM2.5$, and $SO_2$.</a:t>
+            <a:rPr lang="en-US" dirty="0" smtClean="0"/>
+            <a:t> The analysis focuses on </a:t>
           </a:r>
-          <a:endParaRPr lang="en-IN"/>
+          <a:r>
+            <a:rPr lang="en-US" dirty="0" smtClean="0"/>
+            <a:t>CO, NO_2, O_3, PM10, PM2.5, </a:t>
+          </a:r>
+          <a:r>
+            <a:rPr lang="en-US" dirty="0" smtClean="0"/>
+            <a:t>and </a:t>
+          </a:r>
+          <a:r>
+            <a:rPr lang="en-US" dirty="0" smtClean="0"/>
+            <a:t>SO_2.</a:t>
+          </a:r>
+          <a:endParaRPr lang="en-IN" dirty="0"/>
         </a:p>
       </dgm:t>
     </dgm:pt>
@@ -8680,7 +8692,28 @@
     </dgm:pt>
     <dgm:pt modelId="{7FFD873E-548E-4701-8E14-203C2E60F8DE}" type="pres">
       <dgm:prSet presAssocID="{691D2EF7-2E3E-4DD7-B86C-4293C39D5384}" presName="imgShp" presStyleLbl="fgImgPlace1" presStyleIdx="0" presStyleCnt="3"/>
-      <dgm:spPr/>
+      <dgm:spPr>
+        <a:blipFill>
+          <a:blip xmlns:r="http://schemas.openxmlformats.org/officeDocument/2006/relationships" r:embed="rId1" cstate="print">
+            <a:extLst>
+              <a:ext uri="{28A0092B-C50C-407E-A947-70E740481C1C}">
+                <a14:useLocalDpi xmlns:a14="http://schemas.microsoft.com/office/drawing/2010/main" val="0"/>
+              </a:ext>
+            </a:extLst>
+          </a:blip>
+          <a:srcRect/>
+          <a:stretch>
+            <a:fillRect t="-15000" b="-15000"/>
+          </a:stretch>
+        </a:blipFill>
+      </dgm:spPr>
+      <dgm:t>
+        <a:bodyPr/>
+        <a:lstStyle/>
+        <a:p>
+          <a:endParaRPr lang="en-IN"/>
+        </a:p>
+      </dgm:t>
     </dgm:pt>
     <dgm:pt modelId="{C09B222D-42CB-4985-A81E-2887875217F1}" type="pres">
       <dgm:prSet presAssocID="{691D2EF7-2E3E-4DD7-B86C-4293C39D5384}" presName="txShp" presStyleLbl="node1" presStyleIdx="0" presStyleCnt="3">
@@ -8707,7 +8740,28 @@
     </dgm:pt>
     <dgm:pt modelId="{0287FED3-26B7-4B0D-8392-5F11EAD4DF61}" type="pres">
       <dgm:prSet presAssocID="{1D9AA5AE-77D7-45F4-B5CA-44D461A71596}" presName="imgShp" presStyleLbl="fgImgPlace1" presStyleIdx="1" presStyleCnt="3"/>
-      <dgm:spPr/>
+      <dgm:spPr>
+        <a:blipFill>
+          <a:blip xmlns:r="http://schemas.openxmlformats.org/officeDocument/2006/relationships" r:embed="rId2" cstate="print">
+            <a:extLst>
+              <a:ext uri="{28A0092B-C50C-407E-A947-70E740481C1C}">
+                <a14:useLocalDpi xmlns:a14="http://schemas.microsoft.com/office/drawing/2010/main" val="0"/>
+              </a:ext>
+            </a:extLst>
+          </a:blip>
+          <a:srcRect/>
+          <a:stretch>
+            <a:fillRect t="-15000" b="-15000"/>
+          </a:stretch>
+        </a:blipFill>
+      </dgm:spPr>
+      <dgm:t>
+        <a:bodyPr/>
+        <a:lstStyle/>
+        <a:p>
+          <a:endParaRPr lang="en-IN"/>
+        </a:p>
+      </dgm:t>
     </dgm:pt>
     <dgm:pt modelId="{24B13565-CE81-459F-9F67-46395C2F8F20}" type="pres">
       <dgm:prSet presAssocID="{1D9AA5AE-77D7-45F4-B5CA-44D461A71596}" presName="txShp" presStyleLbl="node1" presStyleIdx="1" presStyleCnt="3">
@@ -8734,7 +8788,28 @@
     </dgm:pt>
     <dgm:pt modelId="{99E1402C-B269-4A8F-9B66-D18475D976E8}" type="pres">
       <dgm:prSet presAssocID="{AE83F6E3-2A87-4D4C-9B03-ECCE9D30BCAA}" presName="imgShp" presStyleLbl="fgImgPlace1" presStyleIdx="2" presStyleCnt="3"/>
-      <dgm:spPr/>
+      <dgm:spPr>
+        <a:blipFill>
+          <a:blip xmlns:r="http://schemas.openxmlformats.org/officeDocument/2006/relationships" r:embed="rId3" cstate="print">
+            <a:extLst>
+              <a:ext uri="{28A0092B-C50C-407E-A947-70E740481C1C}">
+                <a14:useLocalDpi xmlns:a14="http://schemas.microsoft.com/office/drawing/2010/main" val="0"/>
+              </a:ext>
+            </a:extLst>
+          </a:blip>
+          <a:srcRect/>
+          <a:stretch>
+            <a:fillRect t="-15000" b="-15000"/>
+          </a:stretch>
+        </a:blipFill>
+      </dgm:spPr>
+      <dgm:t>
+        <a:bodyPr/>
+        <a:lstStyle/>
+        <a:p>
+          <a:endParaRPr lang="en-IN"/>
+        </a:p>
+      </dgm:t>
     </dgm:pt>
     <dgm:pt modelId="{39866816-F1F3-4314-ADD9-636F77DD6331}" type="pres">
       <dgm:prSet presAssocID="{AE83F6E3-2A87-4D4C-9B03-ECCE9D30BCAA}" presName="txShp" presStyleLbl="node1" presStyleIdx="2" presStyleCnt="3">
@@ -11562,14 +11637,26 @@
             </a:spcAft>
           </a:pPr>
           <a:r>
-            <a:rPr lang="en-US" sz="2000" b="1" kern="1200" smtClean="0"/>
+            <a:rPr lang="en-US" sz="2000" b="1" kern="1200" dirty="0" smtClean="0"/>
             <a:t>Primary Pollutants Identified:</a:t>
           </a:r>
           <a:r>
-            <a:rPr lang="en-US" sz="2000" kern="1200" smtClean="0"/>
-            <a:t> The analysis focuses on $CO$, $NO_2$, $O_3$, $PM10$, $PM2.5$, and $SO_2$.</a:t>
+            <a:rPr lang="en-US" sz="2000" kern="1200" dirty="0" smtClean="0"/>
+            <a:t> The analysis focuses on </a:t>
           </a:r>
-          <a:endParaRPr lang="en-IN" sz="2000" kern="1200"/>
+          <a:r>
+            <a:rPr lang="en-US" sz="2000" kern="1200" dirty="0" smtClean="0"/>
+            <a:t>CO, NO_2, O_3, PM10, PM2.5, </a:t>
+          </a:r>
+          <a:r>
+            <a:rPr lang="en-US" sz="2000" kern="1200" dirty="0" smtClean="0"/>
+            <a:t>and </a:t>
+          </a:r>
+          <a:r>
+            <a:rPr lang="en-US" sz="2000" kern="1200" dirty="0" smtClean="0"/>
+            <a:t>SO_2.</a:t>
+          </a:r>
+          <a:endParaRPr lang="en-IN" sz="2000" kern="1200" dirty="0"/>
         </a:p>
       </dsp:txBody>
       <dsp:txXfrm rot="10800000">
@@ -11590,15 +11677,19 @@
         <a:prstGeom prst="ellipse">
           <a:avLst/>
         </a:prstGeom>
-        <a:solidFill>
-          <a:schemeClr val="accent1">
-            <a:tint val="50000"/>
-            <a:hueOff val="0"/>
-            <a:satOff val="0"/>
-            <a:lumOff val="0"/>
-            <a:alphaOff val="0"/>
-          </a:schemeClr>
-        </a:solidFill>
+        <a:blipFill>
+          <a:blip xmlns:r="http://schemas.openxmlformats.org/officeDocument/2006/relationships" r:embed="rId1" cstate="print">
+            <a:extLst>
+              <a:ext uri="{28A0092B-C50C-407E-A947-70E740481C1C}">
+                <a14:useLocalDpi xmlns:a14="http://schemas.microsoft.com/office/drawing/2010/main" val="0"/>
+              </a:ext>
+            </a:extLst>
+          </a:blip>
+          <a:srcRect/>
+          <a:stretch>
+            <a:fillRect t="-15000" b="-15000"/>
+          </a:stretch>
+        </a:blipFill>
         <a:ln w="25400" cap="flat" cmpd="sng" algn="ctr">
           <a:solidFill>
             <a:schemeClr val="lt1">
@@ -11719,15 +11810,19 @@
         <a:prstGeom prst="ellipse">
           <a:avLst/>
         </a:prstGeom>
-        <a:solidFill>
-          <a:schemeClr val="accent1">
-            <a:tint val="50000"/>
-            <a:hueOff val="0"/>
-            <a:satOff val="0"/>
-            <a:lumOff val="0"/>
-            <a:alphaOff val="0"/>
-          </a:schemeClr>
-        </a:solidFill>
+        <a:blipFill>
+          <a:blip xmlns:r="http://schemas.openxmlformats.org/officeDocument/2006/relationships" r:embed="rId2" cstate="print">
+            <a:extLst>
+              <a:ext uri="{28A0092B-C50C-407E-A947-70E740481C1C}">
+                <a14:useLocalDpi xmlns:a14="http://schemas.microsoft.com/office/drawing/2010/main" val="0"/>
+              </a:ext>
+            </a:extLst>
+          </a:blip>
+          <a:srcRect/>
+          <a:stretch>
+            <a:fillRect t="-15000" b="-15000"/>
+          </a:stretch>
+        </a:blipFill>
         <a:ln w="25400" cap="flat" cmpd="sng" algn="ctr">
           <a:solidFill>
             <a:schemeClr val="lt1">
@@ -11848,15 +11943,19 @@
         <a:prstGeom prst="ellipse">
           <a:avLst/>
         </a:prstGeom>
-        <a:solidFill>
-          <a:schemeClr val="accent1">
-            <a:tint val="50000"/>
-            <a:hueOff val="0"/>
-            <a:satOff val="0"/>
-            <a:lumOff val="0"/>
-            <a:alphaOff val="0"/>
-          </a:schemeClr>
-        </a:solidFill>
+        <a:blipFill>
+          <a:blip xmlns:r="http://schemas.openxmlformats.org/officeDocument/2006/relationships" r:embed="rId3" cstate="print">
+            <a:extLst>
+              <a:ext uri="{28A0092B-C50C-407E-A947-70E740481C1C}">
+                <a14:useLocalDpi xmlns:a14="http://schemas.microsoft.com/office/drawing/2010/main" val="0"/>
+              </a:ext>
+            </a:extLst>
+          </a:blip>
+          <a:srcRect/>
+          <a:stretch>
+            <a:fillRect t="-15000" b="-15000"/>
+          </a:stretch>
+        </a:blipFill>
         <a:ln w="25400" cap="flat" cmpd="sng" algn="ctr">
           <a:solidFill>
             <a:schemeClr val="lt1">
@@ -28239,22 +28338,46 @@
             <a:pPr lvl="1"/>
             <a:r>
               <a:rPr lang="en-IN" sz="3100" b="1" dirty="0"/>
-              <a:t>Ozone ($O_3$):</a:t>
+              <a:t>Ozone </a:t>
+            </a:r>
+            <a:r>
+              <a:rPr lang="en-IN" sz="3100" b="1" dirty="0" smtClean="0"/>
+              <a:t>(O_3):</a:t>
+            </a:r>
+            <a:r>
+              <a:rPr lang="en-IN" sz="3100" dirty="0" smtClean="0"/>
+              <a:t> </a:t>
             </a:r>
             <a:r>
               <a:rPr lang="en-IN" sz="3100" dirty="0"/>
-              <a:t> Kolkata leads in Ozone concentration among the top three.</a:t>
+              <a:t>Kolkata leads in Ozone concentration among the top three.</a:t>
             </a:r>
           </a:p>
           <a:p>
             <a:pPr lvl="1"/>
             <a:r>
               <a:rPr lang="en-IN" sz="3100" b="1" dirty="0"/>
-              <a:t>Nitrogen Dioxide ($NO_2$):</a:t>
+              <a:t>Nitrogen Dioxide </a:t>
+            </a:r>
+            <a:r>
+              <a:rPr lang="en-IN" sz="3100" b="1" dirty="0" smtClean="0"/>
+              <a:t>(NO_2):</a:t>
+            </a:r>
+            <a:r>
+              <a:rPr lang="en-IN" sz="3100" dirty="0" smtClean="0"/>
+              <a:t> </a:t>
             </a:r>
             <a:r>
               <a:rPr lang="en-IN" sz="3100" dirty="0"/>
-              <a:t> Delhi shows the highest average $NO_2$ (75.91), followed closely by Mumbai and </a:t>
+              <a:t>Delhi shows the highest average </a:t>
+            </a:r>
+            <a:r>
+              <a:rPr lang="en-IN" sz="3100" dirty="0" smtClean="0"/>
+              <a:t>NO_2 </a:t>
+            </a:r>
+            <a:r>
+              <a:rPr lang="en-IN" sz="3100" dirty="0"/>
+              <a:t>(75.91), followed closely by Mumbai and </a:t>
             </a:r>
             <a:r>
               <a:rPr lang="en-IN" sz="3100" dirty="0" smtClean="0"/>
@@ -28614,7 +28737,7 @@
             <p:ph idx="1"/>
             <p:extLst>
               <p:ext uri="{D42A27DB-BD31-4B8C-83A1-F6EECF244321}">
-                <p14:modId xmlns:p14="http://schemas.microsoft.com/office/powerpoint/2010/main" val="1475822525"/>
+                <p14:modId xmlns:p14="http://schemas.microsoft.com/office/powerpoint/2010/main" val="1457006410"/>
               </p:ext>
             </p:extLst>
           </p:nvPr>
@@ -29243,9 +29366,12 @@
             </a:r>
             <a:r>
               <a:rPr lang="en-US" sz="2400" dirty="0"/>
-              <a:t>AQI Analysis  </a:t>
+              <a:t>AQI </a:t>
             </a:r>
-            <a:endParaRPr lang="en-US" sz="2400" dirty="0" smtClean="0"/>
+            <a:r>
+              <a:rPr lang="en-US" sz="2400" dirty="0" smtClean="0"/>
+              <a:t> Analysis  </a:t>
+            </a:r>
           </a:p>
           <a:p>
             <a:endParaRPr lang="en-US" sz="2400" dirty="0"/>
@@ -29338,17 +29464,20 @@
                   </a:outerShdw>
                 </a:effectLst>
               </a:rPr>
-              <a:t>2. Problem Statement </a:t>
+              <a:t>2. Problem </a:t>
             </a:r>
-            <a:endParaRPr lang="en-US" sz="2800" dirty="0" smtClean="0">
-              <a:effectLst>
-                <a:outerShdw blurRad="38100" dist="38100" dir="2700000" algn="tl">
-                  <a:srgbClr val="000000">
-                    <a:alpha val="43137"/>
-                  </a:srgbClr>
-                </a:outerShdw>
-              </a:effectLst>
-            </a:endParaRPr>
+            <a:r>
+              <a:rPr lang="en-US" sz="2800" dirty="0" smtClean="0">
+                <a:effectLst>
+                  <a:outerShdw blurRad="38100" dist="38100" dir="2700000" algn="tl">
+                    <a:srgbClr val="000000">
+                      <a:alpha val="43137"/>
+                    </a:srgbClr>
+                  </a:outerShdw>
+                </a:effectLst>
+              </a:rPr>
+              <a:t>      Statement </a:t>
+            </a:r>
           </a:p>
           <a:p>
             <a:r>
@@ -30531,7 +30660,7 @@
             <p:ph idx="1"/>
             <p:extLst>
               <p:ext uri="{D42A27DB-BD31-4B8C-83A1-F6EECF244321}">
-                <p14:modId xmlns:p14="http://schemas.microsoft.com/office/powerpoint/2010/main" val="124468940"/>
+                <p14:modId xmlns:p14="http://schemas.microsoft.com/office/powerpoint/2010/main" val="3861173396"/>
               </p:ext>
             </p:extLst>
           </p:nvPr>
